--- a/docs/pptx/auc3/ritu-auc3-linsubhr-sens-death_10pct.pptx
+++ b/docs/pptx/auc3/ritu-auc3-linsubhr-sens-death_10pct.pptx
@@ -2443,7 +2443,7 @@
           </p:nvSpPr>
           <p:spPr>
             <a:xfrm>
-              <a:off x="1342929" y="2073503"/>
+              <a:off x="1343231" y="2073503"/>
               <a:ext cx="0" cy="3649639"/>
             </a:xfrm>
             <a:custGeom>
@@ -2486,7 +2486,7 @@
           </p:nvSpPr>
           <p:spPr>
             <a:xfrm>
-              <a:off x="2182565" y="2073503"/>
+              <a:off x="2181282" y="2073503"/>
               <a:ext cx="0" cy="3649639"/>
             </a:xfrm>
             <a:custGeom>
@@ -2529,7 +2529,7 @@
           </p:nvSpPr>
           <p:spPr>
             <a:xfrm>
-              <a:off x="3022201" y="2073503"/>
+              <a:off x="3019333" y="2073503"/>
               <a:ext cx="0" cy="3649639"/>
             </a:xfrm>
             <a:custGeom>
@@ -2572,7 +2572,7 @@
           </p:nvSpPr>
           <p:spPr>
             <a:xfrm>
-              <a:off x="3861838" y="2073503"/>
+              <a:off x="3857383" y="2073503"/>
               <a:ext cx="0" cy="3649639"/>
             </a:xfrm>
             <a:custGeom>
@@ -2615,7 +2615,7 @@
           </p:nvSpPr>
           <p:spPr>
             <a:xfrm>
-              <a:off x="4701474" y="2073503"/>
+              <a:off x="4695434" y="2073503"/>
               <a:ext cx="0" cy="3649639"/>
             </a:xfrm>
             <a:custGeom>
@@ -2658,7 +2658,7 @@
           </p:nvSpPr>
           <p:spPr>
             <a:xfrm>
-              <a:off x="5541110" y="2073503"/>
+              <a:off x="5533485" y="2073503"/>
               <a:ext cx="0" cy="3649639"/>
             </a:xfrm>
             <a:custGeom>
@@ -2701,7 +2701,7 @@
           </p:nvSpPr>
           <p:spPr>
             <a:xfrm>
-              <a:off x="6380746" y="2073503"/>
+              <a:off x="6371535" y="2073503"/>
               <a:ext cx="0" cy="3649639"/>
             </a:xfrm>
             <a:custGeom>
@@ -2744,7 +2744,7 @@
           </p:nvSpPr>
           <p:spPr>
             <a:xfrm>
-              <a:off x="7220382" y="2073503"/>
+              <a:off x="7209586" y="2073503"/>
               <a:ext cx="0" cy="3649639"/>
             </a:xfrm>
             <a:custGeom>
@@ -2787,7 +2787,7 @@
           </p:nvSpPr>
           <p:spPr>
             <a:xfrm>
-              <a:off x="8060018" y="2073503"/>
+              <a:off x="8047636" y="2073503"/>
               <a:ext cx="0" cy="3649639"/>
             </a:xfrm>
             <a:custGeom>
@@ -3045,7 +3045,7 @@
           </p:nvSpPr>
           <p:spPr>
             <a:xfrm>
-              <a:off x="923111" y="2073503"/>
+              <a:off x="924206" y="2073503"/>
               <a:ext cx="0" cy="3649639"/>
             </a:xfrm>
             <a:custGeom>
@@ -3088,7 +3088,7 @@
           </p:nvSpPr>
           <p:spPr>
             <a:xfrm>
-              <a:off x="1762747" y="2073503"/>
+              <a:off x="1762257" y="2073503"/>
               <a:ext cx="0" cy="3649639"/>
             </a:xfrm>
             <a:custGeom>
@@ -3131,7 +3131,7 @@
           </p:nvSpPr>
           <p:spPr>
             <a:xfrm>
-              <a:off x="2602383" y="2073503"/>
+              <a:off x="2600307" y="2073503"/>
               <a:ext cx="0" cy="3649639"/>
             </a:xfrm>
             <a:custGeom>
@@ -3174,7 +3174,7 @@
           </p:nvSpPr>
           <p:spPr>
             <a:xfrm>
-              <a:off x="3442019" y="2073503"/>
+              <a:off x="3438358" y="2073503"/>
               <a:ext cx="0" cy="3649639"/>
             </a:xfrm>
             <a:custGeom>
@@ -3217,7 +3217,7 @@
           </p:nvSpPr>
           <p:spPr>
             <a:xfrm>
-              <a:off x="4281656" y="2073503"/>
+              <a:off x="4276409" y="2073503"/>
               <a:ext cx="0" cy="3649639"/>
             </a:xfrm>
             <a:custGeom>
@@ -3260,7 +3260,7 @@
           </p:nvSpPr>
           <p:spPr>
             <a:xfrm>
-              <a:off x="5121292" y="2073503"/>
+              <a:off x="5114459" y="2073503"/>
               <a:ext cx="0" cy="3649639"/>
             </a:xfrm>
             <a:custGeom>
@@ -3303,7 +3303,7 @@
           </p:nvSpPr>
           <p:spPr>
             <a:xfrm>
-              <a:off x="5960928" y="2073503"/>
+              <a:off x="5952510" y="2073503"/>
               <a:ext cx="0" cy="3649639"/>
             </a:xfrm>
             <a:custGeom>
@@ -3346,7 +3346,7 @@
           </p:nvSpPr>
           <p:spPr>
             <a:xfrm>
-              <a:off x="6800564" y="2073503"/>
+              <a:off x="6790560" y="2073503"/>
               <a:ext cx="0" cy="3649639"/>
             </a:xfrm>
             <a:custGeom>
@@ -3389,7 +3389,7 @@
           </p:nvSpPr>
           <p:spPr>
             <a:xfrm>
-              <a:off x="7640200" y="2073503"/>
+              <a:off x="7628611" y="2073503"/>
               <a:ext cx="0" cy="3649639"/>
             </a:xfrm>
             <a:custGeom>
@@ -3432,7 +3432,7 @@
           </p:nvSpPr>
           <p:spPr>
             <a:xfrm>
-              <a:off x="8479836" y="2073503"/>
+              <a:off x="8466662" y="2073503"/>
               <a:ext cx="0" cy="3649639"/>
             </a:xfrm>
             <a:custGeom>
@@ -3518,7 +3518,7 @@
           </p:nvSpPr>
           <p:spPr>
             <a:xfrm>
-              <a:off x="4401933" y="2073503"/>
+              <a:off x="4423736" y="2073503"/>
               <a:ext cx="0" cy="3649639"/>
             </a:xfrm>
             <a:custGeom>
@@ -3561,7 +3561,7 @@
           </p:nvSpPr>
           <p:spPr>
             <a:xfrm>
-              <a:off x="3507589" y="2073503"/>
+              <a:off x="3470882" y="2073503"/>
               <a:ext cx="0" cy="3649639"/>
             </a:xfrm>
             <a:custGeom>
@@ -3604,7 +3604,7 @@
           </p:nvSpPr>
           <p:spPr>
             <a:xfrm>
-              <a:off x="5433405" y="2073503"/>
+              <a:off x="5437283" y="2073503"/>
               <a:ext cx="0" cy="3649639"/>
             </a:xfrm>
             <a:custGeom>
@@ -3877,7 +3877,7 @@
           </p:nvSpPr>
           <p:spPr>
             <a:xfrm>
-              <a:off x="842324" y="5785772"/>
+              <a:off x="843419" y="5785772"/>
               <a:ext cx="161574" cy="80101"/>
             </a:xfrm>
             <a:prstGeom prst="rect">
@@ -3923,7 +3923,7 @@
           </p:nvSpPr>
           <p:spPr>
             <a:xfrm>
-              <a:off x="1681960" y="5785772"/>
+              <a:off x="1681469" y="5785772"/>
               <a:ext cx="161574" cy="80101"/>
             </a:xfrm>
             <a:prstGeom prst="rect">
@@ -3969,7 +3969,7 @@
           </p:nvSpPr>
           <p:spPr>
             <a:xfrm>
-              <a:off x="2521596" y="5785772"/>
+              <a:off x="2519520" y="5785772"/>
               <a:ext cx="161574" cy="80101"/>
             </a:xfrm>
             <a:prstGeom prst="rect">
@@ -4015,7 +4015,7 @@
           </p:nvSpPr>
           <p:spPr>
             <a:xfrm>
-              <a:off x="3361232" y="5785772"/>
+              <a:off x="3357571" y="5785772"/>
               <a:ext cx="161574" cy="80101"/>
             </a:xfrm>
             <a:prstGeom prst="rect">
@@ -4061,7 +4061,7 @@
           </p:nvSpPr>
           <p:spPr>
             <a:xfrm>
-              <a:off x="4200868" y="5785772"/>
+              <a:off x="4195621" y="5785772"/>
               <a:ext cx="161574" cy="80101"/>
             </a:xfrm>
             <a:prstGeom prst="rect">
@@ -4107,7 +4107,7 @@
           </p:nvSpPr>
           <p:spPr>
             <a:xfrm>
-              <a:off x="5090202" y="5785772"/>
+              <a:off x="5083370" y="5785772"/>
               <a:ext cx="62179" cy="80101"/>
             </a:xfrm>
             <a:prstGeom prst="rect">
@@ -4153,7 +4153,7 @@
           </p:nvSpPr>
           <p:spPr>
             <a:xfrm>
-              <a:off x="5898749" y="5785772"/>
+              <a:off x="5890331" y="5785772"/>
               <a:ext cx="124358" cy="80101"/>
             </a:xfrm>
             <a:prstGeom prst="rect">
@@ -4199,7 +4199,7 @@
           </p:nvSpPr>
           <p:spPr>
             <a:xfrm>
-              <a:off x="6738385" y="5785772"/>
+              <a:off x="6728381" y="5785772"/>
               <a:ext cx="124358" cy="80101"/>
             </a:xfrm>
             <a:prstGeom prst="rect">
@@ -4245,7 +4245,7 @@
           </p:nvSpPr>
           <p:spPr>
             <a:xfrm>
-              <a:off x="7578021" y="5785772"/>
+              <a:off x="7566432" y="5785772"/>
               <a:ext cx="124358" cy="80101"/>
             </a:xfrm>
             <a:prstGeom prst="rect">
@@ -4291,7 +4291,7 @@
           </p:nvSpPr>
           <p:spPr>
             <a:xfrm>
-              <a:off x="8417657" y="5785772"/>
+              <a:off x="8404483" y="5785772"/>
               <a:ext cx="124358" cy="80101"/>
             </a:xfrm>
             <a:prstGeom prst="rect">
@@ -4462,7 +4462,7 @@
                   <a:latin typeface="Helvetica"/>
                   <a:cs typeface="Helvetica"/>
                 </a:rPr>
-                <a:t>HR per 10 % decline: NA (NA-NA), p_Bonf = NA (n = 6)  |  per IQR decline (Δ = 22.9 %): NA (NA-NA)  |  IQR: [-19.2, 3.7] %</a:t>
+                <a:t>HR per 10 % decline: NA (NA-NA), p_Bonf = NA (n = 6)  |  per IQR decline (Δ = 23.5 %): NA (NA-NA)  |  IQR: [-19.6, 3.9] %</a:t>
               </a:r>
             </a:p>
           </p:txBody>
